--- a/CSCI250-Fall2026/content/Week15_Multimodal-LLMs/slides.pptx
+++ b/CSCI250-Fall2026/content/Week15_Multimodal-LLMs/slides.pptx
@@ -4952,7 +4952,7 @@
                 </a:solidFill>
                 <a:latin typeface="Calibri"/>
               </a:rPr>
-              <a:t>✓ Hit your Week 15 Final-Project milestone (end-to-end)</a:t>
+              <a:t>✓ Capstone: advance 'My Assistant' toward v4 (optional multimodal)</a:t>
             </a:r>
           </a:p>
           <a:p>
@@ -5290,7 +5290,7 @@
                 </a:solidFill>
                 <a:latin typeface="Calibri"/>
               </a:rPr>
-              <a:t>• Final Project continues (A7) — Week 15 milestone</a:t>
+              <a:t>• Capstone work: 'My Assistant' v4 (optional multimodal)</a:t>
             </a:r>
           </a:p>
         </p:txBody>

--- a/CSCI250-Fall2026/content/Week15_Multimodal-LLMs/slides.pptx
+++ b/CSCI250-Fall2026/content/Week15_Multimodal-LLMs/slides.pptx
@@ -20,6 +20,7 @@
     <p:sldId id="268" r:id="rId19"/>
     <p:sldId id="269" r:id="rId20"/>
     <p:sldId id="270" r:id="rId21"/>
+    <p:sldId id="271" r:id="rId22"/>
   </p:sldIdLst>
   <p:sldSz cx="12191695" cy="6858000" type="screen4x3"/>
   <p:notesSz cx="6858000" cy="9144000"/>
@@ -3541,7 +3542,7 @@
                 </a:solidFill>
                 <a:latin typeface="Calibri"/>
               </a:rPr>
-              <a:t>10/15</a:t>
+              <a:t>10/16</a:t>
             </a:r>
           </a:p>
         </p:txBody>
@@ -3914,7 +3915,7 @@
                 </a:solidFill>
                 <a:latin typeface="Calibri"/>
               </a:rPr>
-              <a:t>11/15</a:t>
+              <a:t>11/16</a:t>
             </a:r>
           </a:p>
         </p:txBody>
@@ -4422,7 +4423,7 @@
                 </a:solidFill>
                 <a:latin typeface="Calibri"/>
               </a:rPr>
-              <a:t>13/15</a:t>
+              <a:t>13/16</a:t>
             </a:r>
           </a:p>
         </p:txBody>
@@ -4760,7 +4761,7 @@
                 </a:solidFill>
                 <a:latin typeface="Calibri"/>
               </a:rPr>
-              <a:t>14/15</a:t>
+              <a:t>14/16</a:t>
             </a:r>
           </a:p>
         </p:txBody>
@@ -4774,6 +4775,328 @@
 </file>
 
 <file path=ppt/slides/slide15.xml><?xml version="1.0" encoding="utf-8"?>
+<p:sld xmlns:a="http://schemas.openxmlformats.org/drawingml/2006/main" xmlns:p="http://schemas.openxmlformats.org/presentationml/2006/main" xmlns:r="http://schemas.openxmlformats.org/officeDocument/2006/relationships">
+  <p:cSld>
+    <p:bg>
+      <p:bgPr>
+        <a:solidFill>
+          <a:srgbClr val="FFFFFF"/>
+        </a:solidFill>
+        <a:effectLst/>
+      </p:bgPr>
+    </p:bg>
+    <p:spTree>
+      <p:nvGrpSpPr>
+        <p:cNvPr id="1" name=""/>
+        <p:cNvGrpSpPr/>
+        <p:nvPr/>
+      </p:nvGrpSpPr>
+      <p:grpSpPr/>
+      <p:sp>
+        <p:nvSpPr>
+          <p:cNvPr id="2" name="Rectangle 1"/>
+          <p:cNvSpPr/>
+          <p:nvPr/>
+        </p:nvSpPr>
+        <p:spPr>
+          <a:xfrm>
+            <a:off x="0" y="0"/>
+            <a:ext cx="12191695" cy="1051560"/>
+          </a:xfrm>
+          <a:prstGeom prst="rect">
+            <a:avLst/>
+          </a:prstGeom>
+          <a:solidFill>
+            <a:srgbClr val="0B1F3A"/>
+          </a:solidFill>
+          <a:ln>
+            <a:noFill/>
+          </a:ln>
+          <a:effectLst/>
+        </p:spPr>
+        <p:style>
+          <a:lnRef idx="1">
+            <a:schemeClr val="accent1"/>
+          </a:lnRef>
+          <a:fillRef idx="3">
+            <a:schemeClr val="accent1"/>
+          </a:fillRef>
+          <a:effectRef idx="2">
+            <a:schemeClr val="accent1"/>
+          </a:effectRef>
+          <a:fontRef idx="minor">
+            <a:schemeClr val="lt1"/>
+          </a:fontRef>
+        </p:style>
+        <p:txBody>
+          <a:bodyPr rtlCol="0" anchor="ctr"/>
+          <a:lstStyle/>
+          <a:p>
+            <a:pPr algn="ctr"/>
+          </a:p>
+        </p:txBody>
+      </p:sp>
+      <p:sp>
+        <p:nvSpPr>
+          <p:cNvPr id="3" name="Rectangle 2"/>
+          <p:cNvSpPr/>
+          <p:nvPr/>
+        </p:nvSpPr>
+        <p:spPr>
+          <a:xfrm>
+            <a:off x="0" y="1051560"/>
+            <a:ext cx="12191695" cy="54864"/>
+          </a:xfrm>
+          <a:prstGeom prst="rect">
+            <a:avLst/>
+          </a:prstGeom>
+          <a:solidFill>
+            <a:srgbClr val="128C8C"/>
+          </a:solidFill>
+          <a:ln>
+            <a:noFill/>
+          </a:ln>
+          <a:effectLst/>
+        </p:spPr>
+        <p:style>
+          <a:lnRef idx="1">
+            <a:schemeClr val="accent1"/>
+          </a:lnRef>
+          <a:fillRef idx="3">
+            <a:schemeClr val="accent1"/>
+          </a:fillRef>
+          <a:effectRef idx="2">
+            <a:schemeClr val="accent1"/>
+          </a:effectRef>
+          <a:fontRef idx="minor">
+            <a:schemeClr val="lt1"/>
+          </a:fontRef>
+        </p:style>
+        <p:txBody>
+          <a:bodyPr rtlCol="0" anchor="ctr"/>
+          <a:lstStyle/>
+          <a:p>
+            <a:pPr algn="ctr"/>
+          </a:p>
+        </p:txBody>
+      </p:sp>
+      <p:sp>
+        <p:nvSpPr>
+          <p:cNvPr id="4" name="TextBox 3"/>
+          <p:cNvSpPr txBox="1"/>
+          <p:nvPr/>
+        </p:nvSpPr>
+        <p:spPr>
+          <a:xfrm>
+            <a:off x="548640" y="201168"/>
+            <a:ext cx="11064240" cy="731520"/>
+          </a:xfrm>
+          <a:prstGeom prst="rect">
+            <a:avLst/>
+          </a:prstGeom>
+          <a:noFill/>
+        </p:spPr>
+        <p:txBody>
+          <a:bodyPr wrap="square" anchor="ctr">
+            <a:spAutoFit/>
+          </a:bodyPr>
+          <a:lstStyle/>
+          <a:p>
+            <a:pPr algn="l"/>
+            <a:r>
+              <a:rPr sz="2800" b="1">
+                <a:solidFill>
+                  <a:srgbClr val="FFFFFF"/>
+                </a:solidFill>
+                <a:latin typeface="Calibri"/>
+              </a:rPr>
+              <a:t>Provenance &amp; Watermarking — Label AI Media</a:t>
+            </a:r>
+          </a:p>
+        </p:txBody>
+      </p:sp>
+      <p:sp>
+        <p:nvSpPr>
+          <p:cNvPr id="5" name="TextBox 4"/>
+          <p:cNvSpPr txBox="1"/>
+          <p:nvPr/>
+        </p:nvSpPr>
+        <p:spPr>
+          <a:xfrm>
+            <a:off x="731520" y="1371600"/>
+            <a:ext cx="10698480" cy="4754880"/>
+          </a:xfrm>
+          <a:prstGeom prst="rect">
+            <a:avLst/>
+          </a:prstGeom>
+          <a:noFill/>
+        </p:spPr>
+        <p:txBody>
+          <a:bodyPr wrap="square">
+            <a:spAutoFit/>
+          </a:bodyPr>
+          <a:lstStyle/>
+          <a:p>
+            <a:pPr>
+              <a:spcAft>
+                <a:spcPts val="800"/>
+              </a:spcAft>
+            </a:pPr>
+            <a:r>
+              <a:rPr sz="2000">
+                <a:solidFill>
+                  <a:srgbClr val="1A1A1A"/>
+                </a:solidFill>
+                <a:latin typeface="Calibri"/>
+              </a:rPr>
+              <a:t>• How do you tell AI media from a real photo? → provenance</a:t>
+            </a:r>
+          </a:p>
+          <a:p>
+            <a:pPr>
+              <a:spcAft>
+                <a:spcPts val="800"/>
+              </a:spcAft>
+            </a:pPr>
+            <a:r>
+              <a:rPr sz="2000">
+                <a:solidFill>
+                  <a:srgbClr val="1A1A1A"/>
+                </a:solidFill>
+                <a:latin typeface="Calibri"/>
+              </a:rPr>
+              <a:t>• Watermarking: invisible signal in the pixels — SynthID (Google)</a:t>
+            </a:r>
+          </a:p>
+          <a:p>
+            <a:pPr>
+              <a:spcAft>
+                <a:spcPts val="800"/>
+              </a:spcAft>
+            </a:pPr>
+            <a:r>
+              <a:rPr sz="2000">
+                <a:solidFill>
+                  <a:srgbClr val="1A1A1A"/>
+                </a:solidFill>
+                <a:latin typeface="Calibri"/>
+              </a:rPr>
+              <a:t>• Content Credentials / C2PA: signed, tamper-evident metadata 'label'</a:t>
+            </a:r>
+          </a:p>
+          <a:p>
+            <a:pPr>
+              <a:spcAft>
+                <a:spcPts val="800"/>
+              </a:spcAft>
+            </a:pPr>
+            <a:r>
+              <a:rPr sz="2000">
+                <a:solidFill>
+                  <a:srgbClr val="1A1A1A"/>
+                </a:solidFill>
+                <a:latin typeface="Calibri"/>
+              </a:rPr>
+              <a:t>• Why: deepfakes, misinformation — EU AI Act requires disclosure</a:t>
+            </a:r>
+          </a:p>
+          <a:p>
+            <a:pPr lvl="1">
+              <a:spcAft>
+                <a:spcPts val="800"/>
+              </a:spcAft>
+            </a:pPr>
+            <a:r>
+              <a:rPr sz="1800">
+                <a:solidFill>
+                  <a:srgbClr val="6B7280"/>
+                </a:solidFill>
+                <a:latin typeface="Calibri"/>
+              </a:rPr>
+              <a:t>– Prefer provenance-aware tools; disclose AI media you ship</a:t>
+            </a:r>
+          </a:p>
+        </p:txBody>
+      </p:sp>
+      <p:sp>
+        <p:nvSpPr>
+          <p:cNvPr id="6" name="TextBox 5"/>
+          <p:cNvSpPr txBox="1"/>
+          <p:nvPr/>
+        </p:nvSpPr>
+        <p:spPr>
+          <a:xfrm>
+            <a:off x="365760" y="6446520"/>
+            <a:ext cx="8229600" cy="365760"/>
+          </a:xfrm>
+          <a:prstGeom prst="rect">
+            <a:avLst/>
+          </a:prstGeom>
+          <a:noFill/>
+        </p:spPr>
+        <p:txBody>
+          <a:bodyPr wrap="square">
+            <a:spAutoFit/>
+          </a:bodyPr>
+          <a:lstStyle/>
+          <a:p>
+            <a:pPr algn="l"/>
+            <a:r>
+              <a:rPr sz="1000" b="0">
+                <a:solidFill>
+                  <a:srgbClr val="6B7280"/>
+                </a:solidFill>
+                <a:latin typeface="Calibri"/>
+              </a:rPr>
+              <a:t>Palomar College · CSCI 250 · Fall 2026</a:t>
+            </a:r>
+          </a:p>
+        </p:txBody>
+      </p:sp>
+      <p:sp>
+        <p:nvSpPr>
+          <p:cNvPr id="7" name="TextBox 6"/>
+          <p:cNvSpPr txBox="1"/>
+          <p:nvPr/>
+        </p:nvSpPr>
+        <p:spPr>
+          <a:xfrm>
+            <a:off x="11155680" y="6446520"/>
+            <a:ext cx="822960" cy="365760"/>
+          </a:xfrm>
+          <a:prstGeom prst="rect">
+            <a:avLst/>
+          </a:prstGeom>
+          <a:noFill/>
+        </p:spPr>
+        <p:txBody>
+          <a:bodyPr wrap="square">
+            <a:spAutoFit/>
+          </a:bodyPr>
+          <a:lstStyle/>
+          <a:p>
+            <a:pPr algn="r"/>
+            <a:r>
+              <a:rPr sz="1000" b="0">
+                <a:solidFill>
+                  <a:srgbClr val="6B7280"/>
+                </a:solidFill>
+                <a:latin typeface="Calibri"/>
+              </a:rPr>
+              <a:t>15/16</a:t>
+            </a:r>
+          </a:p>
+        </p:txBody>
+      </p:sp>
+    </p:spTree>
+  </p:cSld>
+  <p:clrMapOvr>
+    <a:masterClrMapping/>
+  </p:clrMapOvr>
+</p:sld>
+</file>
+
+<file path=ppt/slides/slide16.xml><?xml version="1.0" encoding="utf-8"?>
 <p:sld xmlns:a="http://schemas.openxmlformats.org/drawingml/2006/main" xmlns:p="http://schemas.openxmlformats.org/presentationml/2006/main" xmlns:r="http://schemas.openxmlformats.org/officeDocument/2006/relationships">
   <p:cSld>
     <p:bg>
@@ -5038,7 +5361,7 @@
                 </a:solidFill>
                 <a:latin typeface="Calibri"/>
               </a:rPr>
-              <a:t>15/15</a:t>
+              <a:t>16/16</a:t>
             </a:r>
           </a:p>
         </p:txBody>
@@ -5360,7 +5683,7 @@
                 </a:solidFill>
                 <a:latin typeface="Calibri"/>
               </a:rPr>
-              <a:t>2/15</a:t>
+              <a:t>2/16</a:t>
             </a:r>
           </a:p>
         </p:txBody>
@@ -5743,7 +6066,7 @@
                 </a:solidFill>
                 <a:latin typeface="Calibri"/>
               </a:rPr>
-              <a:t>4/15</a:t>
+              <a:t>4/16</a:t>
             </a:r>
           </a:p>
         </p:txBody>
@@ -6206,7 +6529,7 @@
                 </a:solidFill>
                 <a:latin typeface="Calibri"/>
               </a:rPr>
-              <a:t>5/15</a:t>
+              <a:t>5/16</a:t>
             </a:r>
           </a:p>
         </p:txBody>
@@ -6673,7 +6996,7 @@
                 </a:solidFill>
                 <a:latin typeface="Calibri"/>
               </a:rPr>
-              <a:t>7/15</a:t>
+              <a:t>7/16</a:t>
             </a:r>
           </a:p>
         </p:txBody>
@@ -7057,7 +7380,7 @@
                 </a:solidFill>
                 <a:latin typeface="Calibri"/>
               </a:rPr>
-              <a:t>8/15</a:t>
+              <a:t>8/16</a:t>
             </a:r>
           </a:p>
         </p:txBody>
